--- a/canvas_material/lectures/powerpoint/Session09-PitchWorkshop.pptx
+++ b/canvas_material/lectures/powerpoint/Session09-PitchWorkshop.pptx
@@ -1133,7 +1133,7 @@
           <a:p>
             <a:r>
               <a:rPr lang="en-US" dirty="0"/>
-              <a:t>Close fast and concretely — logistics first, because an unclear Pitch Day costs everyone. Say the Monday piece clearly: Wednesday ends with a private ranked slip rather than people sorting into groups, the anchor proposals go up Thursday, and teams are announced Monday — so the weekend reading is real work. Stress the random draw: the order is generated and shown Wednesday at the start of class, so there is no back-of-the-room strategy and nobody gets to watch two pitches first. Everyone prepares to go first. Then the order of operations tonight: rehearse first, build slides second — slides built before the words are decided become the words. End on the line at the top: six minutes to make someone want to build it with you.</a:t>
+              <a:t>Close fast and concretely — logistics first, because an unclear Pitch Day costs everyone. Say the Monday piece clearly: Wednesday ends with a private ranked preference, submitted in Canvas, rather than people sorting into groups, the anchor proposals go up Thursday, and teams are announced Monday — so the weekend reading is real work. Stress the random draw: the order is generated and shown Wednesday at the start of class, so there is no back-of-the-room strategy and nobody gets to watch two pitches first. Everyone prepares to go first. Then the order of operations tonight: rehearse first, build slides second — slides built before the words are decided become the words. End on the line at the top: six minutes to make someone want to build it with you.</a:t>
             </a:r>
             <a:endParaRPr lang="en-US" dirty="0"/>
           </a:p>
@@ -8664,7 +8664,7 @@
                 <a:ea typeface="Calibri" pitchFamily="34" charset="-122"/>
                 <a:cs typeface="Calibri" pitchFamily="34" charset="-120"/>
               </a:rPr>
-              <a:t>You leave with a ranked preference slip, not a team — proposals post Thursday</a:t>
+              <a:t>You leave with a ranked preference, submitted in Canvas — not a team. Proposals post Thursday</a:t>
             </a:r>
             <a:endParaRPr lang="en-US" sz="1550" dirty="0"/>
           </a:p>
